--- a/03_Network_Tram.pptx
+++ b/03_Network_Tram.pptx
@@ -104,6 +104,11 @@
       </a:defRPr>
     </a:lvl9pPr>
   </p:defaultTextStyle>
+  <p:extLst>
+    <p:ext uri="{EFAFB233-063F-42B5-8137-9DF3F51BA10A}">
+      <p15:sldGuideLst xmlns:p15="http://schemas.microsoft.com/office/powerpoint/2012/main"/>
+    </p:ext>
+  </p:extLst>
 </p:presentation>
 </file>
 
@@ -254,7 +259,7 @@
           <a:p>
             <a:fld id="{BAA449E4-2D7C-47DB-848C-CA83FF986CDD}" type="datetimeFigureOut">
               <a:rPr lang="en-US" smtClean="0"/>
-              <a:t>3/29/2026</a:t>
+              <a:t>4/4/2026</a:t>
             </a:fld>
             <a:endParaRPr lang="en-US"/>
           </a:p>
@@ -452,7 +457,7 @@
           <a:p>
             <a:fld id="{BAA449E4-2D7C-47DB-848C-CA83FF986CDD}" type="datetimeFigureOut">
               <a:rPr lang="en-US" smtClean="0"/>
-              <a:t>3/29/2026</a:t>
+              <a:t>4/4/2026</a:t>
             </a:fld>
             <a:endParaRPr lang="en-US"/>
           </a:p>
@@ -660,7 +665,7 @@
           <a:p>
             <a:fld id="{BAA449E4-2D7C-47DB-848C-CA83FF986CDD}" type="datetimeFigureOut">
               <a:rPr lang="en-US" smtClean="0"/>
-              <a:t>3/29/2026</a:t>
+              <a:t>4/4/2026</a:t>
             </a:fld>
             <a:endParaRPr lang="en-US"/>
           </a:p>
@@ -858,7 +863,7 @@
           <a:p>
             <a:fld id="{BAA449E4-2D7C-47DB-848C-CA83FF986CDD}" type="datetimeFigureOut">
               <a:rPr lang="en-US" smtClean="0"/>
-              <a:t>3/29/2026</a:t>
+              <a:t>4/4/2026</a:t>
             </a:fld>
             <a:endParaRPr lang="en-US"/>
           </a:p>
@@ -1133,7 +1138,7 @@
           <a:p>
             <a:fld id="{BAA449E4-2D7C-47DB-848C-CA83FF986CDD}" type="datetimeFigureOut">
               <a:rPr lang="en-US" smtClean="0"/>
-              <a:t>3/29/2026</a:t>
+              <a:t>4/4/2026</a:t>
             </a:fld>
             <a:endParaRPr lang="en-US"/>
           </a:p>
@@ -1398,7 +1403,7 @@
           <a:p>
             <a:fld id="{BAA449E4-2D7C-47DB-848C-CA83FF986CDD}" type="datetimeFigureOut">
               <a:rPr lang="en-US" smtClean="0"/>
-              <a:t>3/29/2026</a:t>
+              <a:t>4/4/2026</a:t>
             </a:fld>
             <a:endParaRPr lang="en-US"/>
           </a:p>
@@ -1810,7 +1815,7 @@
           <a:p>
             <a:fld id="{BAA449E4-2D7C-47DB-848C-CA83FF986CDD}" type="datetimeFigureOut">
               <a:rPr lang="en-US" smtClean="0"/>
-              <a:t>3/29/2026</a:t>
+              <a:t>4/4/2026</a:t>
             </a:fld>
             <a:endParaRPr lang="en-US"/>
           </a:p>
@@ -1951,7 +1956,7 @@
           <a:p>
             <a:fld id="{BAA449E4-2D7C-47DB-848C-CA83FF986CDD}" type="datetimeFigureOut">
               <a:rPr lang="en-US" smtClean="0"/>
-              <a:t>3/29/2026</a:t>
+              <a:t>4/4/2026</a:t>
             </a:fld>
             <a:endParaRPr lang="en-US"/>
           </a:p>
@@ -2064,7 +2069,7 @@
           <a:p>
             <a:fld id="{BAA449E4-2D7C-47DB-848C-CA83FF986CDD}" type="datetimeFigureOut">
               <a:rPr lang="en-US" smtClean="0"/>
-              <a:t>3/29/2026</a:t>
+              <a:t>4/4/2026</a:t>
             </a:fld>
             <a:endParaRPr lang="en-US"/>
           </a:p>
@@ -2375,7 +2380,7 @@
           <a:p>
             <a:fld id="{BAA449E4-2D7C-47DB-848C-CA83FF986CDD}" type="datetimeFigureOut">
               <a:rPr lang="en-US" smtClean="0"/>
-              <a:t>3/29/2026</a:t>
+              <a:t>4/4/2026</a:t>
             </a:fld>
             <a:endParaRPr lang="en-US"/>
           </a:p>
@@ -2663,7 +2668,7 @@
           <a:p>
             <a:fld id="{BAA449E4-2D7C-47DB-848C-CA83FF986CDD}" type="datetimeFigureOut">
               <a:rPr lang="en-US" smtClean="0"/>
-              <a:t>3/29/2026</a:t>
+              <a:t>4/4/2026</a:t>
             </a:fld>
             <a:endParaRPr lang="en-US"/>
           </a:p>
@@ -2904,7 +2909,7 @@
           <a:p>
             <a:fld id="{BAA449E4-2D7C-47DB-848C-CA83FF986CDD}" type="datetimeFigureOut">
               <a:rPr lang="en-US" smtClean="0"/>
-              <a:t>3/29/2026</a:t>
+              <a:t>4/4/2026</a:t>
             </a:fld>
             <a:endParaRPr lang="en-US"/>
           </a:p>
@@ -4056,7 +4061,7 @@
         </p:nvCxnSpPr>
         <p:spPr>
           <a:xfrm>
-            <a:off x="5779363" y="3968318"/>
+            <a:off x="5779363" y="3923930"/>
             <a:ext cx="0" cy="301841"/>
           </a:xfrm>
           <a:prstGeom prst="straightConnector1">

--- a/03_Network_Tram.pptx
+++ b/03_Network_Tram.pptx
@@ -3754,7 +3754,7 @@
         </p:nvCxnSpPr>
         <p:spPr>
           <a:xfrm>
-            <a:off x="5779363" y="1677880"/>
+            <a:off x="5859262" y="1677880"/>
             <a:ext cx="0" cy="408372"/>
           </a:xfrm>
           <a:prstGeom prst="line">
@@ -3934,7 +3934,7 @@
         </p:nvSpPr>
         <p:spPr>
           <a:xfrm>
-            <a:off x="5060673" y="2192784"/>
+            <a:off x="5095647" y="2192784"/>
             <a:ext cx="1437381" cy="369332"/>
           </a:xfrm>
           <a:prstGeom prst="rect">
@@ -3974,7 +3974,7 @@
         </p:nvCxnSpPr>
         <p:spPr>
           <a:xfrm>
-            <a:off x="5779363" y="2725445"/>
+            <a:off x="5859262" y="2734322"/>
             <a:ext cx="0" cy="248574"/>
           </a:xfrm>
           <a:prstGeom prst="straightConnector1">
@@ -4061,7 +4061,7 @@
         </p:nvCxnSpPr>
         <p:spPr>
           <a:xfrm>
-            <a:off x="5779363" y="3923930"/>
+            <a:off x="5859262" y="3941685"/>
             <a:ext cx="0" cy="301841"/>
           </a:xfrm>
           <a:prstGeom prst="straightConnector1">
@@ -4233,7 +4233,7 @@
         </p:nvCxnSpPr>
         <p:spPr>
           <a:xfrm>
-            <a:off x="5779363" y="5069150"/>
+            <a:off x="5832086" y="5051395"/>
             <a:ext cx="0" cy="346229"/>
           </a:xfrm>
           <a:prstGeom prst="straightConnector1">
